--- a/docs/reference_materials/powerpoints/draft pres.pptx
+++ b/docs/reference_materials/powerpoints/draft pres.pptx
@@ -3229,7 +3229,7 @@
                 <a:ea typeface="Calibri" pitchFamily="34" charset="-122"/>
                 <a:cs typeface="Calibri" pitchFamily="34" charset="-120"/>
               </a:rPr>
-              <a:t>Phases 1-2: Optimizer comparison (AdamW, SGD)  —  Adam remains best</a:t>
+              <a:t>Phases 1-2: Optimizer comparison (AdamW, SGD),  Adam remains best</a:t>
             </a:r>
             <a:endParaRPr lang="en-US" sz="1300" dirty="0"/>
           </a:p>
@@ -6696,7 +6696,7 @@
                 <a:ea typeface="Calibri" pitchFamily="34" charset="-122"/>
                 <a:cs typeface="Calibri" pitchFamily="34" charset="-120"/>
               </a:rPr>
-              <a:t>Graph Isomorphism Network — more expressive message passing</a:t>
+              <a:t>Graph Isomorphism Network, more expressive message passing</a:t>
             </a:r>
             <a:endParaRPr lang="en-US" sz="1200" dirty="0"/>
           </a:p>
@@ -8503,18 +8503,18 @@
 </file>
 
 <file path=customXml/item2.xml><?xml version="1.0" encoding="utf-8"?>
+<p:properties xmlns:p="http://schemas.microsoft.com/office/2006/metadata/properties" xmlns:xsi="http://www.w3.org/2001/XMLSchema-instance" xmlns:pc="http://schemas.microsoft.com/office/infopath/2007/PartnerControls">
+  <documentManagement/>
+</p:properties>
+</file>
+
+<file path=customXml/item3.xml><?xml version="1.0" encoding="utf-8"?>
 <?mso-contentType ?>
 <FormTemplates xmlns="http://schemas.microsoft.com/sharepoint/v3/contenttype/forms">
   <Display>DocumentLibraryForm</Display>
   <Edit>DocumentLibraryForm</Edit>
   <New>DocumentLibraryForm</New>
 </FormTemplates>
-</file>
-
-<file path=customXml/item3.xml><?xml version="1.0" encoding="utf-8"?>
-<p:properties xmlns:p="http://schemas.microsoft.com/office/2006/metadata/properties" xmlns:xsi="http://www.w3.org/2001/XMLSchema-instance" xmlns:pc="http://schemas.microsoft.com/office/infopath/2007/PartnerControls">
-  <documentManagement/>
-</p:properties>
 </file>
 
 <file path=customXml/itemProps1.xml><?xml version="1.0" encoding="utf-8"?>
@@ -8536,18 +8536,18 @@
 </file>
 
 <file path=customXml/itemProps2.xml><?xml version="1.0" encoding="utf-8"?>
-<ds:datastoreItem xmlns:ds="http://schemas.openxmlformats.org/officeDocument/2006/customXml" ds:itemID="{46C02176-421E-4469-B6C2-6437A9690DAF}">
-  <ds:schemaRefs>
-    <ds:schemaRef ds:uri="http://schemas.microsoft.com/sharepoint/v3/contenttype/forms"/>
-  </ds:schemaRefs>
-</ds:datastoreItem>
-</file>
-
-<file path=customXml/itemProps3.xml><?xml version="1.0" encoding="utf-8"?>
 <ds:datastoreItem xmlns:ds="http://schemas.openxmlformats.org/officeDocument/2006/customXml" ds:itemID="{D74ED9B8-9FE6-4BEC-B456-79D1D6C96D7E}">
   <ds:schemaRefs>
     <ds:schemaRef ds:uri="http://schemas.microsoft.com/office/2006/metadata/properties"/>
     <ds:schemaRef ds:uri="http://schemas.microsoft.com/office/infopath/2007/PartnerControls"/>
   </ds:schemaRefs>
 </ds:datastoreItem>
+</file>
+
+<file path=customXml/itemProps3.xml><?xml version="1.0" encoding="utf-8"?>
+<ds:datastoreItem xmlns:ds="http://schemas.openxmlformats.org/officeDocument/2006/customXml" ds:itemID="{46C02176-421E-4469-B6C2-6437A9690DAF}">
+  <ds:schemaRefs>
+    <ds:schemaRef ds:uri="http://schemas.microsoft.com/sharepoint/v3/contenttype/forms"/>
+  </ds:schemaRefs>
+</ds:datastoreItem>
 </file>